--- a/library/seminars/sem-06/rendered/sem-06-n38.pptx
+++ b/library/seminars/sem-06/rendered/sem-06-n38.pptx
@@ -502,36 +502,54 @@
           <a:lstStyle/>
           <a:p>
             <a:r>
-              <a:t>Герой тот же — разработчик, который два занятия подряд заводил здесь хук и скилл. Сцена другая: продукт, в котором он работает каждый день, с тарифами и двумя годами миграций. Сессия открыта с утра под одну правку — выгрузку отчёта.</a:t>
+              <a:t>Герой тот же — разработчик, который два занятия подряд заводил здесь хук и скилл. Продукт, в котором он работает каждый день: тарифы, участники, два года миграций. Задача дня обычная — завести тариф «Команда», двадцать участников вместо пяти.</a:t>
             </a:r>
           </a:p>
           <a:p/>
           <a:p>
             <a:r>
-              <a:t>В чат пишет технический директор: «а у нас проверяется, что бесплатный тариф не может пригласить больше пяти участников? Клиент жалуется, что пригласил восьмого». Ответ на одно слово.</a:t>
+              <a:t>Утром он открывает сессию и минут пятнадцать объясняет задачу: как тариф называется, кому доступен, что делать со старыми аккаунтами, какие случаи проверить. Править они будут здесь.</a:t>
             </a:r>
           </a:p>
           <a:p/>
           <a:p>
             <a:r>
-              <a:t>На деле лимит живёт в четырёх местах: middleware при добавлении участника, конфиг тарифов, отдельная миграция для старых аккаунтов, клиентская проверка на случай недоступности сервера. Миграций пятнадцать, лимит менялся в трёх — листать приходится все. Сорок с лишним файлов, минут двадцать. Ответ верный: да, но для аккаунтов до миграции двадцать четвёртого года не применяется.</a:t>
+              <a:t>Но прежде чем править, нужен список: где лимит участников вообще проверяется. Пропустишь одно место — новый тариф пройдёт конфиг и упрётся в проверку, про которую никто уже не помнит.</a:t>
             </a:r>
           </a:p>
           <a:p/>
           <a:p>
             <a:r>
-              <a:t>Дальше он возвращается к своей правке. И агент переспрашивает то, что ему объясняли утром: что выгружать и в каком виде. Час ушёл на повторное объяснение.</a:t>
+              <a:t>Агент ищет. Находит четыре места: middleware, конфиг тарифов, отдельная миграция для старых аккаунтов, клиентская проверка. Миграций пятнадцать, лимит менялся в трёх — листать приходится все. Сорок с лишним файлов, минут двадцать.</a:t>
             </a:r>
           </a:p>
           <a:p/>
           <a:p>
             <a:r>
-              <a:t>Заметьте, за что он заплатил. Ответ верный, чтение быстрое. Нужное влезло в окно целиком и вытеснило работу, ради которой сессию открывали. Это второй промах из начала занятия — вот он целиком.</a:t>
+              <a:t>Он говорит: теперь правь по этому списку. И агент переспрашивает то, что ему объясняли утром: как называется тариф и сколько в нём участников.</a:t>
             </a:r>
           </a:p>
           <a:p/>
           <a:p>
             <a:r>
+              <a:t>Заметьте, за что он заплатил. Список верный, чтение быстрое. Сорок файлов влезли в контекст целиком и вытеснили задачу, ради которой сессию открывали. Это второй промах из начала занятия — вот он целиком.</a:t>
+            </a:r>
+          </a:p>
+          <a:p/>
+          <a:p>
+            <a:r>
+              <a:t>Если спросят прямо сейчас, почему он не открыл вторую сессию и не спросил там: потому что править будет эта. Вторая сессия ответ даст — и оставит его у себя; в рабочую вы переносите его руками и своим пересказом. Полностью разбираем через два экрана, вместе с четырьмя другими вариантами.</a:t>
+            </a:r>
+          </a:p>
+          <a:p/>
+          <a:p>
+            <a:r>
+              <a:t>Если спросят, почему тогда не перенести во вторую сессию всю работу целиком: потому что задача объяснена здесь, и объяснять её второй раз — ровно та потеря, которую мы считаем. Переезд не экономит, он платит ту же цену заранее.</a:t>
+            </a:r>
+          </a:p>
+          <a:p/>
+          <a:p>
+            <a:r>
               <a:t>Если спросят, почему нельзя было сразу знать, где искать: потому что это обычная ситуация любого продукта, где правило менялось годами, мелкими правками. Документации, которая держала бы все четыре точки в одном месте, здесь никогда не было, и завести её задним числом стоит дороже, чем один раз прочитать сорок файлов.</a:t>
             </a:r>
           </a:p>
@@ -544,19 +562,7 @@
           <a:p/>
           <a:p>
             <a:r>
-              <a:t>Если спросят, при чём тут правка выгрузки, если вопрос был про лимит: именно при том, что ни при чём. Вытеснило работу чтение, не предстоящая правка. Будь вопрос из той же области, разделить две причины на одной сцене не вышло бы.</a:t>
-            </a:r>
-          </a:p>
-          <a:p/>
-          <a:p>
-            <a:r>
-              <a:t>Если спросят, не проще ли было открыть второй чат и спросить там: это и есть верное направление, и через два экрана мы его разберём вместе с четырьмя другими. Разница между вторым чатом и ролью названа в базе ступени: роль зовут изнутри сессии, итог возвращается в неё сам, и права у роли можно урезать списком.</a:t>
-            </a:r>
-          </a:p>
-          <a:p/>
-          <a:p>
-            <a:r>
-              <a:t>Если спросят, почему цена — час, когда чтения было двадцать минут: двадцать минут он потратил на дело, ответ техническому директору был нужен. Час ушёл на то, чтобы заново сказать уже сказанное. Это единственная часть дня, которую можно было не тратить.</a:t>
+              <a:t>Если спросят, почему цена — полчаса, когда чтения было двадцать минут: двадцать минут он потратил на дело, список был нужен. Полчаса ушло на то, чтобы заново сказать уже сказанное и вернуться в прерванную работу. Это единственная часть дня, которую можно было не тратить.</a:t>
             </a:r>
           </a:p>
         </p:txBody>
@@ -3607,7 +3613,7 @@
                 </a:solidFill>
                 <a:latin typeface="Arial"/>
               </a:rPr>
-              <a:t>Ответ он получил. Правку начал заново</a:t>
+              <a:t>Нашёл все четыре места. Правку начал заново</a:t>
             </a:r>
           </a:p>
         </p:txBody>
@@ -3620,12 +3626,12 @@
         </p:nvSpPr>
         <p:spPr>
           <a:xfrm>
-            <a:off x="502920" y="1089355"/>
-            <a:ext cx="11183112" cy="3506724"/>
+            <a:off x="502920" y="1001649"/>
+            <a:ext cx="11183112" cy="3709035"/>
           </a:xfrm>
           <a:prstGeom prst="roundRect">
             <a:avLst>
-              <a:gd name="adj" fmla="val 8691"/>
+              <a:gd name="adj" fmla="val 8217"/>
             </a:avLst>
           </a:prstGeom>
           <a:solidFill>
@@ -3668,8 +3674,8 @@
         </p:nvSpPr>
         <p:spPr>
           <a:xfrm>
-            <a:off x="722376" y="1308811"/>
-            <a:ext cx="329184" cy="532638"/>
+            <a:off x="722376" y="1221105"/>
+            <a:ext cx="329184" cy="734949"/>
           </a:xfrm>
           <a:prstGeom prst="rect">
             <a:avLst/>
@@ -3710,8 +3716,8 @@
         </p:nvSpPr>
         <p:spPr>
           <a:xfrm>
-            <a:off x="1106424" y="1308811"/>
-            <a:ext cx="10360152" cy="532638"/>
+            <a:off x="1106424" y="1221105"/>
+            <a:ext cx="10360152" cy="734949"/>
           </a:xfrm>
           <a:prstGeom prst="rect">
             <a:avLst/>
@@ -3739,7 +3745,7 @@
                 </a:solidFill>
                 <a:latin typeface="Arial"/>
               </a:rPr>
-              <a:t>Тот же разработчик, что заводил здесь хук и скилл. Сцена другая: продукт, где он работает каждый день, — тарифы, участники, два года миграций. Сессия открыта с утра под одну правку — выгрузку отчёта.</a:t>
+              <a:t>Тот же разработчик, что заводил здесь хук и скилл. Сцена другая: продукт, где он работает каждый день, — тарифы, участники, два года миграций. Задача дня — завести тариф «Команда»: двадцать участников вместо пяти.</a:t>
             </a:r>
           </a:p>
         </p:txBody>
@@ -3752,7 +3758,7 @@
         </p:nvSpPr>
         <p:spPr>
           <a:xfrm>
-            <a:off x="722376" y="1841449"/>
+            <a:off x="722376" y="1956054"/>
             <a:ext cx="329184" cy="532638"/>
           </a:xfrm>
           <a:prstGeom prst="rect">
@@ -3794,7 +3800,7 @@
         </p:nvSpPr>
         <p:spPr>
           <a:xfrm>
-            <a:off x="1106424" y="1841449"/>
+            <a:off x="1106424" y="1956054"/>
             <a:ext cx="10360152" cy="532638"/>
           </a:xfrm>
           <a:prstGeom prst="rect">
@@ -3823,7 +3829,7 @@
                 </a:solidFill>
                 <a:latin typeface="Arial"/>
               </a:rPr>
-              <a:t>Технический директор спрашивает в чате: «а у нас проверяется, что бесплатный тариф не может пригласить больше пяти участников? Клиент жалуется, что пригласил восьмого». Вопрос на одно слово.</a:t>
+              <a:t>Сессия открыта с утра. Минут пятнадцать он объясняет агенту задачу: как тариф называется, кому доступен, что делать со старыми аккаунтами, какие случаи проверить. Правку они делают здесь же.</a:t>
             </a:r>
           </a:p>
         </p:txBody>
@@ -3836,8 +3842,8 @@
         </p:nvSpPr>
         <p:spPr>
           <a:xfrm>
-            <a:off x="722376" y="2374087"/>
-            <a:ext cx="329184" cy="734949"/>
+            <a:off x="722376" y="2488692"/>
+            <a:ext cx="329184" cy="532638"/>
           </a:xfrm>
           <a:prstGeom prst="rect">
             <a:avLst/>
@@ -3878,8 +3884,8 @@
         </p:nvSpPr>
         <p:spPr>
           <a:xfrm>
-            <a:off x="1106424" y="2374087"/>
-            <a:ext cx="10360152" cy="734949"/>
+            <a:off x="1106424" y="2488692"/>
+            <a:ext cx="10360152" cy="532638"/>
           </a:xfrm>
           <a:prstGeom prst="rect">
             <a:avLst/>
@@ -3907,7 +3913,7 @@
                 </a:solidFill>
                 <a:latin typeface="Arial"/>
               </a:rPr>
-              <a:t>Лимит живёт в четырёх местах: его проверяет middleware при добавлении участника, значение задано в конфиге тарифов, для аккаунтов до смены тарифной сетки он переопределён отдельной миграцией, и клиентский компонент дублирует ту же проверку на случай недоступности сервера.</a:t>
+              <a:t>Прежде чем править, нужен список мест, где лимит участников вообще проверяется. Пропустишь одно — новый тариф пройдёт конфиг и упрётся в проверку, про которую никто уже не помнит.</a:t>
             </a:r>
           </a:p>
         </p:txBody>
@@ -3920,8 +3926,8 @@
         </p:nvSpPr>
         <p:spPr>
           <a:xfrm>
-            <a:off x="722376" y="3109036"/>
-            <a:ext cx="329184" cy="734949"/>
+            <a:off x="722376" y="3021330"/>
+            <a:ext cx="329184" cy="937259"/>
           </a:xfrm>
           <a:prstGeom prst="rect">
             <a:avLst/>
@@ -3962,8 +3968,8 @@
         </p:nvSpPr>
         <p:spPr>
           <a:xfrm>
-            <a:off x="1106424" y="3109036"/>
-            <a:ext cx="10360152" cy="734949"/>
+            <a:off x="1106424" y="3021330"/>
+            <a:ext cx="10360152" cy="937259"/>
           </a:xfrm>
           <a:prstGeom prst="rect">
             <a:avLst/>
@@ -3991,7 +3997,7 @@
                 </a:solidFill>
                 <a:latin typeface="Arial"/>
               </a:rPr>
-              <a:t>Миграций за два года пятнадцать, лимит менялся в трёх — чтобы не упустить переопределение, листать приходится все. Открытых файлов набирается больше сорока, чтения — минут двадцать. Ответ выходит верный: «да, но для аккаунтов до миграции 2024 года не применяется».</a:t>
+              <a:t>Агент ищет и находит четыре: middleware при добавлении участника, конфиг тарифов, отдельная миграция для аккаунтов до смены тарифной сетки, клиентский компонент с той же проверкой на случай недоступности сервера. Миграций за два года пятнадцать, лимит менялся в трёх — листать приходится все. Открытых файлов больше сорока, чтения — минут двадцать.</a:t>
             </a:r>
           </a:p>
         </p:txBody>
@@ -4004,7 +4010,7 @@
         </p:nvSpPr>
         <p:spPr>
           <a:xfrm>
-            <a:off x="722376" y="3843985"/>
+            <a:off x="722376" y="3958590"/>
             <a:ext cx="329184" cy="532638"/>
           </a:xfrm>
           <a:prstGeom prst="rect">
@@ -4046,7 +4052,7 @@
         </p:nvSpPr>
         <p:spPr>
           <a:xfrm>
-            <a:off x="1106424" y="3843985"/>
+            <a:off x="1106424" y="3958590"/>
             <a:ext cx="10360152" cy="532638"/>
           </a:xfrm>
           <a:prstGeom prst="rect">
@@ -4075,7 +4081,7 @@
                 </a:solidFill>
                 <a:latin typeface="Arial"/>
               </a:rPr>
-              <a:t>Он возвращается к своей правке — и агент переспрашивает то, что ему объясняли утром: что именно выгружать и в каком виде. Сессию приходится начинать заново.</a:t>
+              <a:t>«Теперь правь по этому списку» — и агент переспрашивает то, что ему объясняли утром: как называется тариф и сколько в нём участников. Объяснять приходится второй раз.</a:t>
             </a:r>
           </a:p>
         </p:txBody>
@@ -4088,8 +4094,8 @@
         </p:nvSpPr>
         <p:spPr>
           <a:xfrm>
-            <a:off x="502920" y="5125669"/>
-            <a:ext cx="82296" cy="982980"/>
+            <a:off x="502920" y="5021008"/>
+            <a:ext cx="82296" cy="1219200"/>
           </a:xfrm>
           <a:prstGeom prst="roundRect">
             <a:avLst>
@@ -4134,8 +4140,8 @@
         </p:nvSpPr>
         <p:spPr>
           <a:xfrm>
-            <a:off x="859536" y="5253685"/>
-            <a:ext cx="10643616" cy="726948"/>
+            <a:off x="859536" y="5149024"/>
+            <a:ext cx="10643616" cy="963168"/>
           </a:xfrm>
           <a:prstGeom prst="rect">
             <a:avLst/>
@@ -4163,7 +4169,7 @@
                 </a:solidFill>
                 <a:latin typeface="Arial"/>
               </a:rPr>
-              <a:t>Час ушёл на то, чтобы объяснить правку второй раз. Ответ при этом был верный, и чтение шло быстро: нужное влезло в окно целиком и вытеснило работу, ради которой сессию открывали. Это второй промах из начала занятия, предъявленный целиком.</a:t>
+              <a:t>Полчаса ушло на то, чтобы сказать уже сказанное и вернуться туда, где он остановился. Список при этом верный, и чтение шло быстро: нужное влезло в контекст целиком и вытеснило работу, ради которой сессию открывали. Это второй промах из начала занятия, предъявленный целиком.</a:t>
             </a:r>
           </a:p>
         </p:txBody>
@@ -4205,7 +4211,7 @@
                 </a:solidFill>
                 <a:latin typeface="Arial"/>
               </a:rPr>
-              <a:t>38</a:t>
+              <a:t>39</a:t>
             </a:r>
           </a:p>
         </p:txBody>
